--- a/交付物/演示文稿/M0_演示文稿_CFG-5_第8课_跑通第一圈_v2.pptx
+++ b/交付物/演示文稿/M0_演示文稿_CFG-5_第8课_跑通第一圈_v2.pptx
@@ -2323,7 +2323,7 @@
                 <a:latin typeface="MiSans"/>
                 <a:ea typeface="MiSans"/>
               </a:rPr>
-              <a:t>柴火创客学院 M0 · CFG-5 学期班</a:t>
+              <a:t>柴火创客学园 M0 · CFG-5 学期班</a:t>
             </a:r>
             <a:endParaRPr lang="en-US" sz="1100"/>
           </a:p>
